--- a/Notes/Mina_Meeting_Slides_2026-10-07.pptx
+++ b/Notes/Mina_Meeting_Slides_2026-10-07.pptx
@@ -4628,7 +4628,7 @@
                 <a:ea typeface="Calibri" pitchFamily="34" charset="-122"/>
                 <a:cs typeface="Calibri" pitchFamily="34" charset="-120"/>
               </a:rPr>
-              <a:t>Layer-wise CKA (200 sequences). Protein agrees best at its embedding layer, before any context mixing.</a:t>
+              <a:t>Layer-wise CKA (194 sequences). Protein agrees best at its embedding layer, before any context mixing.</a:t>
             </a:r>
             <a:endParaRPr lang="en-US" sz="1300" dirty="0"/>
           </a:p>
